--- a/顧問簡報_升級版.pptx
+++ b/顧問簡報_升級版.pptx
@@ -7363,7 +7363,7 @@
                 <a:ea typeface="Microsoft JhengHei"/>
                 <a:cs typeface="Microsoft JhengHei"/>
               </a:rPr>
-              <a:t>· 法說會錄音 → STT 轉逐字稿</a:t>
+              <a:t>· 法說會錄音 → STT 轉逐字稿　· 年報敘述章節 → 語意索引</a:t>
             </a:r>
           </a:p>
         </p:txBody>
@@ -8667,7 +8667,7 @@
                 <a:ea typeface="Microsoft JhengHei"/>
                 <a:cs typeface="Microsoft JhengHei"/>
               </a:rPr>
-              <a:t>360</a:t>
+              <a:t>846</a:t>
             </a:r>
           </a:p>
         </p:txBody>
@@ -12568,7 +12568,7 @@
                 <a:ea typeface="Microsoft JhengHei"/>
                 <a:cs typeface="Microsoft JhengHei"/>
               </a:rPr>
-              <a:t>●  </a:t>
+              <a:t>●  六道防護　數字不符／引用別期／比較無效四色提示，一鍵取正解</a:t>
             </a:r>
             <a:r>
               <a:rPr sz="1500" b="1">
@@ -12579,7 +12579,7 @@
                 <a:ea typeface="Microsoft JhengHei"/>
                 <a:cs typeface="Microsoft JhengHei"/>
               </a:rPr>
-              <a:t>交叉驗證　</a:t>
+              <a:t/>
             </a:r>
             <a:r>
               <a:rPr sz="1500">
@@ -12590,7 +12590,7 @@
                 <a:ea typeface="Microsoft JhengHei"/>
                 <a:cs typeface="Microsoft JhengHei"/>
               </a:rPr>
-              <a:t>EAP 與本地不符自動標紅、一鍵取正解</a:t>
+              <a:t/>
             </a:r>
           </a:p>
           <a:p>
@@ -14214,7 +14214,7 @@
                 <a:ea typeface="Microsoft JhengHei"/>
                 <a:cs typeface="Microsoft JhengHei"/>
               </a:rPr>
-              <a:t>每則答案附出處；攔下 10 倍換算錯與累計跨季亂比。</a:t>
+              <a:t>每則答案附出處；六道防護攔下換算錯、跨期亂比、引用別期。</a:t>
             </a:r>
           </a:p>
         </p:txBody>
@@ -17012,7 +17012,7 @@
                 <a:ea typeface="Microsoft JhengHei"/>
                 <a:cs typeface="Microsoft JhengHei"/>
               </a:rPr>
-              <a:t>VLM／STT／備援</a:t>
+              <a:t>VLM／STT 資料管線</a:t>
             </a:r>
           </a:p>
         </p:txBody>
